--- a/templates/sage_mist/KCLNLP_SageMist_Poster.pptx
+++ b/templates/sage_mist/KCLNLP_SageMist_Poster.pptx
@@ -3227,7 +3227,7 @@
           <a:p>
             <a:pPr algn="l"/>
             <a:r>
-              <a:rPr sz="8800" b="1" i="0">
+              <a:rPr sz="12000" b="1" i="0">
                 <a:solidFill>
                   <a:srgbClr val="2B2F2A"/>
                 </a:solidFill>
@@ -3305,7 +3305,7 @@
           <a:p>
             <a:pPr algn="l"/>
             <a:r>
-              <a:rPr sz="3600" b="0" i="0">
+              <a:rPr sz="4800" b="0" i="0">
                 <a:solidFill>
                   <a:srgbClr val="2B2F2A"/>
                 </a:solidFill>
@@ -3340,7 +3340,7 @@
           <a:p>
             <a:pPr algn="l"/>
             <a:r>
-              <a:rPr sz="2600" b="0" i="1">
+              <a:rPr sz="3600" b="0" i="1">
                 <a:solidFill>
                   <a:srgbClr val="6F756C"/>
                 </a:solidFill>
@@ -3410,7 +3410,7 @@
           <a:p>
             <a:pPr algn="l"/>
             <a:r>
-              <a:rPr sz="4800" b="1" i="0">
+              <a:rPr sz="6400" b="1" i="0">
                 <a:solidFill>
                   <a:srgbClr val="5C7261"/>
                 </a:solidFill>
@@ -3488,7 +3488,7 @@
           <a:p>
             <a:pPr algn="l"/>
             <a:r>
-              <a:rPr sz="2600" b="0" i="0">
+              <a:rPr sz="3600" b="0" i="0">
                 <a:solidFill>
                   <a:srgbClr val="2B2F2A"/>
                 </a:solidFill>
@@ -3523,7 +3523,7 @@
           <a:p>
             <a:pPr algn="l"/>
             <a:r>
-              <a:rPr sz="4800" b="1" i="0">
+              <a:rPr sz="6400" b="1" i="0">
                 <a:solidFill>
                   <a:srgbClr val="5C7261"/>
                 </a:solidFill>
@@ -3605,7 +3605,7 @@
               </a:spcAft>
             </a:pPr>
             <a:r>
-              <a:rPr sz="2600">
+              <a:rPr sz="3600">
                 <a:solidFill>
                   <a:srgbClr val="2B2F2A"/>
                 </a:solidFill>
@@ -3621,7 +3621,7 @@
               </a:spcAft>
             </a:pPr>
             <a:r>
-              <a:rPr sz="2600">
+              <a:rPr sz="3600">
                 <a:solidFill>
                   <a:srgbClr val="2B2F2A"/>
                 </a:solidFill>
@@ -3637,7 +3637,7 @@
               </a:spcAft>
             </a:pPr>
             <a:r>
-              <a:rPr sz="2600">
+              <a:rPr sz="3600">
                 <a:solidFill>
                   <a:srgbClr val="2B2F2A"/>
                 </a:solidFill>
@@ -3653,7 +3653,7 @@
               </a:spcAft>
             </a:pPr>
             <a:r>
-              <a:rPr sz="2600">
+              <a:rPr sz="3600">
                 <a:solidFill>
                   <a:srgbClr val="2B2F2A"/>
                 </a:solidFill>
@@ -3669,7 +3669,7 @@
               </a:spcAft>
             </a:pPr>
             <a:r>
-              <a:rPr sz="2600">
+              <a:rPr sz="3600">
                 <a:solidFill>
                   <a:srgbClr val="2B2F2A"/>
                 </a:solidFill>
@@ -3704,7 +3704,7 @@
           <a:p>
             <a:pPr algn="l"/>
             <a:r>
-              <a:rPr sz="4800" b="1" i="0">
+              <a:rPr sz="6400" b="1" i="0">
                 <a:solidFill>
                   <a:srgbClr val="5C7261"/>
                 </a:solidFill>
@@ -3827,7 +3827,7 @@
           <a:p>
             <a:pPr algn="ctr"/>
             <a:r>
-              <a:rPr sz="2800" b="0" i="1">
+              <a:rPr sz="4000" b="0" i="1">
                 <a:solidFill>
                   <a:srgbClr val="6F756C"/>
                 </a:solidFill>
@@ -3862,7 +3862,7 @@
           <a:p>
             <a:pPr algn="l"/>
             <a:r>
-              <a:rPr sz="2000" b="0" i="1">
+              <a:rPr sz="2800" b="0" i="1">
                 <a:solidFill>
                   <a:srgbClr val="6F756C"/>
                 </a:solidFill>
@@ -3901,7 +3901,7 @@
               </a:spcAft>
             </a:pPr>
             <a:r>
-              <a:rPr sz="2600">
+              <a:rPr sz="3600">
                 <a:solidFill>
                   <a:srgbClr val="2B2F2A"/>
                 </a:solidFill>
@@ -3917,7 +3917,7 @@
               </a:spcAft>
             </a:pPr>
             <a:r>
-              <a:rPr sz="2600">
+              <a:rPr sz="3600">
                 <a:solidFill>
                   <a:srgbClr val="2B2F2A"/>
                 </a:solidFill>
@@ -3933,7 +3933,7 @@
               </a:spcAft>
             </a:pPr>
             <a:r>
-              <a:rPr sz="2600">
+              <a:rPr sz="3600">
                 <a:solidFill>
                   <a:srgbClr val="2B2F2A"/>
                 </a:solidFill>
@@ -3949,7 +3949,7 @@
               </a:spcAft>
             </a:pPr>
             <a:r>
-              <a:rPr sz="2600">
+              <a:rPr sz="3600">
                 <a:solidFill>
                   <a:srgbClr val="2B2F2A"/>
                 </a:solidFill>
@@ -3984,7 +3984,7 @@
           <a:p>
             <a:pPr algn="l"/>
             <a:r>
-              <a:rPr sz="4800" b="1" i="0">
+              <a:rPr sz="6400" b="1" i="0">
                 <a:solidFill>
                   <a:srgbClr val="5C7261"/>
                 </a:solidFill>
@@ -4062,7 +4062,7 @@
           <a:p>
             <a:pPr algn="l"/>
             <a:r>
-              <a:rPr sz="2600" b="0" i="0">
+              <a:rPr sz="3600" b="0" i="0">
                 <a:solidFill>
                   <a:srgbClr val="2B2F2A"/>
                 </a:solidFill>
@@ -4097,7 +4097,7 @@
           <a:p>
             <a:pPr algn="l"/>
             <a:r>
-              <a:rPr sz="4800" b="1" i="0">
+              <a:rPr sz="6400" b="1" i="0">
                 <a:solidFill>
                   <a:srgbClr val="5C7261"/>
                 </a:solidFill>
@@ -4179,7 +4179,7 @@
               </a:spcAft>
             </a:pPr>
             <a:r>
-              <a:rPr sz="2000">
+              <a:rPr sz="2800">
                 <a:solidFill>
                   <a:srgbClr val="6F756C"/>
                 </a:solidFill>
@@ -4195,7 +4195,7 @@
               </a:spcAft>
             </a:pPr>
             <a:r>
-              <a:rPr sz="2000">
+              <a:rPr sz="2800">
                 <a:solidFill>
                   <a:srgbClr val="6F756C"/>
                 </a:solidFill>
@@ -4211,7 +4211,7 @@
               </a:spcAft>
             </a:pPr>
             <a:r>
-              <a:rPr sz="2000">
+              <a:rPr sz="2800">
                 <a:solidFill>
                   <a:srgbClr val="6F756C"/>
                 </a:solidFill>
@@ -4246,7 +4246,7 @@
           <a:p>
             <a:pPr algn="l"/>
             <a:r>
-              <a:rPr sz="4800" b="1" i="0">
+              <a:rPr sz="6400" b="1" i="0">
                 <a:solidFill>
                   <a:srgbClr val="5C7261"/>
                 </a:solidFill>
@@ -4324,7 +4324,7 @@
           <a:p>
             <a:pPr algn="l"/>
             <a:r>
-              <a:rPr sz="2000" b="0" i="1">
+              <a:rPr sz="2800" b="0" i="1">
                 <a:solidFill>
                   <a:srgbClr val="6F756C"/>
                 </a:solidFill>
@@ -4402,7 +4402,7 @@
           <a:p>
             <a:pPr algn="l"/>
             <a:r>
-              <a:rPr sz="2400" b="0" i="0">
+              <a:rPr sz="3200" b="0" i="0">
                 <a:solidFill>
                   <a:srgbClr val="2B2F2A"/>
                 </a:solidFill>
@@ -4437,7 +4437,7 @@
           <a:p>
             <a:pPr algn="l"/>
             <a:r>
-              <a:rPr sz="2000" b="0" i="1">
+              <a:rPr sz="2800" b="0" i="1">
                 <a:solidFill>
                   <a:srgbClr val="6F756C"/>
                 </a:solidFill>
@@ -4517,7 +4517,7 @@
           <a:p>
             <a:pPr algn="ctr"/>
             <a:r>
-              <a:rPr sz="2400" b="0" i="1">
+              <a:rPr sz="3200" b="0" i="1">
                 <a:solidFill>
                   <a:srgbClr val="6F756C"/>
                 </a:solidFill>
